--- a/dataset/guides_final/SW/guide/IT-SW-003_업무용 SW 실행·오류 대응 가이드.pptx
+++ b/dataset/guides_final/SW/guide/IT-SW-003_업무용 SW 실행·오류 대응 가이드.pptx
@@ -3252,7 +3252,7 @@
                 <a:ea typeface="Malgun Gothic"/>
                 <a:cs typeface="Malgun Gothic"/>
               </a:rPr>
-              <a:t>한화시스템 ICT 임직원 IT 안내 · SW·라이선스</a:t>
+              <a:t>가상 ICT 기업 임직원 IT 안내 · SW·라이선스</a:t>
             </a:r>
           </a:p>
         </p:txBody>
@@ -3484,7 +3484,7 @@
                 <a:ea typeface="Malgun Gothic"/>
                 <a:cs typeface="Malgun Gothic"/>
               </a:rPr>
-              <a:t>© HANWHA SYSTEMS ICT · IT-SW-003 · 사내 일반</a:t>
+              <a:t>© 가상 ICT 기업 · IT-SW-003 · 사내 일반</a:t>
             </a:r>
           </a:p>
         </p:txBody>
@@ -3732,7 +3732,7 @@
                 <a:ea typeface="Malgun Gothic"/>
                 <a:cs typeface="Malgun Gothic"/>
               </a:rPr>
-              <a:t>© HANWHA SYSTEMS ICT · IT-SW-003 · 사내 일반</a:t>
+              <a:t>© 가상 ICT 기업 · IT-SW-003 · 사내 일반</a:t>
             </a:r>
           </a:p>
         </p:txBody>
@@ -6537,7 +6537,7 @@
                 <a:ea typeface="Malgun Gothic"/>
                 <a:cs typeface="Malgun Gothic"/>
               </a:rPr>
-              <a:t>© HANWHA SYSTEMS ICT · IT-SW-003 · 사내 일반</a:t>
+              <a:t>© 가상 ICT 기업 · IT-SW-003 · 사내 일반</a:t>
             </a:r>
           </a:p>
         </p:txBody>
@@ -8187,7 +8187,7 @@
                 <a:ea typeface="Malgun Gothic"/>
                 <a:cs typeface="Malgun Gothic"/>
               </a:rPr>
-              <a:t>© HANWHA SYSTEMS ICT · IT-SW-003 · 사내 일반</a:t>
+              <a:t>© 가상 ICT 기업 · IT-SW-003 · 사내 일반</a:t>
             </a:r>
           </a:p>
         </p:txBody>
@@ -8585,7 +8585,7 @@
                 <a:ea typeface="Malgun Gothic"/>
                 <a:cs typeface="Malgun Gothic"/>
               </a:rPr>
-              <a:t>© HANWHA SYSTEMS ICT · IT-SW-003 · 사내 일반</a:t>
+              <a:t>© 가상 ICT 기업 · IT-SW-003 · 사내 일반</a:t>
             </a:r>
           </a:p>
         </p:txBody>
@@ -10657,7 +10657,7 @@
                 <a:ea typeface="Malgun Gothic"/>
                 <a:cs typeface="Malgun Gothic"/>
               </a:rPr>
-              <a:t>© HANWHA SYSTEMS ICT · IT-SW-003 · 사내 일반</a:t>
+              <a:t>© 가상 ICT 기업 · IT-SW-003 · 사내 일반</a:t>
             </a:r>
           </a:p>
         </p:txBody>
@@ -12094,7 +12094,7 @@
                 <a:ea typeface="Malgun Gothic"/>
                 <a:cs typeface="Malgun Gothic"/>
               </a:rPr>
-              <a:t>© HANWHA SYSTEMS ICT · IT-SW-003 · 사내 일반</a:t>
+              <a:t>© 가상 ICT 기업 · IT-SW-003 · 사내 일반</a:t>
             </a:r>
           </a:p>
         </p:txBody>
@@ -14368,7 +14368,7 @@
                 <a:ea typeface="Malgun Gothic"/>
                 <a:cs typeface="Malgun Gothic"/>
               </a:rPr>
-              <a:t>© HANWHA SYSTEMS ICT · IT-SW-003 · 사내 일반</a:t>
+              <a:t>© 가상 ICT 기업 · IT-SW-003 · 사내 일반</a:t>
             </a:r>
           </a:p>
         </p:txBody>
@@ -16317,7 +16317,7 @@
                 <a:ea typeface="Malgun Gothic"/>
                 <a:cs typeface="Malgun Gothic"/>
               </a:rPr>
-              <a:t>© HANWHA SYSTEMS ICT · IT-SW-003 · 사내 일반</a:t>
+              <a:t>© 가상 ICT 기업 · IT-SW-003 · 사내 일반</a:t>
             </a:r>
           </a:p>
         </p:txBody>
@@ -17915,7 +17915,7 @@
                 <a:ea typeface="Malgun Gothic"/>
                 <a:cs typeface="Malgun Gothic"/>
               </a:rPr>
-              <a:t>© HANWHA SYSTEMS ICT · IT-SW-003 · 사내 일반</a:t>
+              <a:t>© 가상 ICT 기업 · IT-SW-003 · 사내 일반</a:t>
             </a:r>
           </a:p>
         </p:txBody>
@@ -19652,7 +19652,7 @@
                 <a:ea typeface="Malgun Gothic"/>
                 <a:cs typeface="Malgun Gothic"/>
               </a:rPr>
-              <a:t>© HANWHA SYSTEMS ICT · IT-SW-003 · 사내 일반</a:t>
+              <a:t>© 가상 ICT 기업 · IT-SW-003 · 사내 일반</a:t>
             </a:r>
           </a:p>
         </p:txBody>
@@ -21481,7 +21481,7 @@
                 <a:ea typeface="Malgun Gothic"/>
                 <a:cs typeface="Malgun Gothic"/>
               </a:rPr>
-              <a:t>© HANWHA SYSTEMS ICT · IT-SW-003 · 사내 일반</a:t>
+              <a:t>© 가상 ICT 기업 · IT-SW-003 · 사내 일반</a:t>
             </a:r>
           </a:p>
         </p:txBody>
@@ -21879,7 +21879,7 @@
                 <a:ea typeface="Malgun Gothic"/>
                 <a:cs typeface="Malgun Gothic"/>
               </a:rPr>
-              <a:t>© HANWHA SYSTEMS ICT · IT-SW-003 · 사내 일반</a:t>
+              <a:t>© 가상 ICT 기업 · IT-SW-003 · 사내 일반</a:t>
             </a:r>
           </a:p>
         </p:txBody>
@@ -23123,7 +23123,7 @@
                 <a:ea typeface="Malgun Gothic"/>
                 <a:cs typeface="Malgun Gothic"/>
               </a:rPr>
-              <a:t>© HANWHA SYSTEMS ICT · IT-SW-003 · 사내 일반</a:t>
+              <a:t>© 가상 ICT 기업 · IT-SW-003 · 사내 일반</a:t>
             </a:r>
           </a:p>
         </p:txBody>
@@ -24984,7 +24984,7 @@
                 <a:ea typeface="Malgun Gothic"/>
                 <a:cs typeface="Malgun Gothic"/>
               </a:rPr>
-              <a:t>© HANWHA SYSTEMS ICT · IT-SW-003 · 사내 일반</a:t>
+              <a:t>© 가상 ICT 기업 · IT-SW-003 · 사내 일반</a:t>
             </a:r>
           </a:p>
         </p:txBody>
@@ -26090,7 +26090,7 @@
                 <a:ea typeface="Malgun Gothic"/>
                 <a:cs typeface="Malgun Gothic"/>
               </a:rPr>
-              <a:t>© HANWHA SYSTEMS ICT · IT-SW-003 · 사내 일반</a:t>
+              <a:t>© 가상 ICT 기업 · IT-SW-003 · 사내 일반</a:t>
             </a:r>
           </a:p>
         </p:txBody>
@@ -28795,7 +28795,7 @@
                 <a:ea typeface="Malgun Gothic"/>
                 <a:cs typeface="Malgun Gothic"/>
               </a:rPr>
-              <a:t>© HANWHA SYSTEMS ICT · IT-SW-003 · 사내 일반</a:t>
+              <a:t>© 가상 ICT 기업 · IT-SW-003 · 사내 일반</a:t>
             </a:r>
           </a:p>
         </p:txBody>
@@ -30604,7 +30604,7 @@
                 <a:ea typeface="Malgun Gothic"/>
                 <a:cs typeface="Malgun Gothic"/>
               </a:rPr>
-              <a:t>© HANWHA SYSTEMS ICT · IT-SW-003 · 사내 일반</a:t>
+              <a:t>© 가상 ICT 기업 · IT-SW-003 · 사내 일반</a:t>
             </a:r>
           </a:p>
         </p:txBody>
@@ -31000,7 +31000,7 @@
                 <a:ea typeface="Consolas"/>
                 <a:cs typeface="Consolas"/>
               </a:rPr>
-              <a:t>setx REQUESTS_CA_BUNDLE "C:\hanwha\certs\hanwha-ict-root.pem"</a:t>
+              <a:t>setx REQUESTS_CA_BUNDLE "C:\ict\certs\ict-root.pem"</a:t>
             </a:r>
           </a:p>
           <a:p>
@@ -31024,7 +31024,7 @@
                 <a:ea typeface="Consolas"/>
                 <a:cs typeface="Consolas"/>
               </a:rPr>
-              <a:t>setx SSL_CERT_FILE "C:\hanwha\certs\hanwha-ict-root.pem"</a:t>
+              <a:t>setx SSL_CERT_FILE "C:\ict\certs\ict-root.pem"</a:t>
             </a:r>
           </a:p>
           <a:p>
@@ -31072,7 +31072,7 @@
                 <a:ea typeface="Consolas"/>
                 <a:cs typeface="Consolas"/>
               </a:rPr>
-              <a:t>setx NODE_EXTRA_CA_CERTS "C:\hanwha\certs\hanwha-ict-root.pem"</a:t>
+              <a:t>setx NODE_EXTRA_CA_CERTS "C:\ict\certs\ict-root.pem"</a:t>
             </a:r>
           </a:p>
           <a:p>
@@ -31120,7 +31120,7 @@
                 <a:ea typeface="Consolas"/>
                 <a:cs typeface="Consolas"/>
               </a:rPr>
-              <a:t>git config --global http.sslCAInfo "C:/hanwha/certs/hanwha-ict-root.pem"</a:t>
+              <a:t>git config --global http.sslCAInfo "C:/ict/certs/ict-root.pem"</a:t>
             </a:r>
           </a:p>
         </p:txBody>
@@ -31256,7 +31256,7 @@
                 <a:ea typeface="Consolas"/>
                 <a:cs typeface="Consolas"/>
               </a:rPr>
-              <a:t>echo 'export REQUESTS_CA_BUNDLE=/Library/hanwha/certs/hanwha-ict-root.pem' &gt;&gt; ~/.zshrc</a:t>
+              <a:t>echo 'export REQUESTS_CA_BUNDLE=/Library/ict/certs/ict-root.pem' &gt;&gt; ~/.zshrc</a:t>
             </a:r>
           </a:p>
           <a:p>
@@ -31280,7 +31280,7 @@
                 <a:ea typeface="Consolas"/>
                 <a:cs typeface="Consolas"/>
               </a:rPr>
-              <a:t>echo 'export SSL_CERT_FILE=/Library/hanwha/certs/hanwha-ict-root.pem' &gt;&gt; ~/.zshrc</a:t>
+              <a:t>echo 'export SSL_CERT_FILE=/Library/ict/certs/ict-root.pem' &gt;&gt; ~/.zshrc</a:t>
             </a:r>
           </a:p>
           <a:p>
@@ -31304,7 +31304,7 @@
                 <a:ea typeface="Consolas"/>
                 <a:cs typeface="Consolas"/>
               </a:rPr>
-              <a:t>echo 'export NODE_EXTRA_CA_CERTS=/Library/hanwha/certs/hanwha-ict-root.pem' &gt;&gt; ~/.zshrc</a:t>
+              <a:t>echo 'export NODE_EXTRA_CA_CERTS=/Library/ict/certs/ict-root.pem' &gt;&gt; ~/.zshrc</a:t>
             </a:r>
           </a:p>
           <a:p>
@@ -31328,7 +31328,7 @@
                 <a:ea typeface="Consolas"/>
                 <a:cs typeface="Consolas"/>
               </a:rPr>
-              <a:t>git config --global http.sslCAInfo /Library/hanwha/certs/hanwha-ict-root.pem</a:t>
+              <a:t>git config --global http.sslCAInfo /Library/ict/certs/ict-root.pem</a:t>
             </a:r>
           </a:p>
           <a:p>
@@ -31626,7 +31626,7 @@
                 <a:ea typeface="Malgun Gothic"/>
                 <a:cs typeface="Malgun Gothic"/>
               </a:rPr>
-              <a:t>© HANWHA SYSTEMS ICT · IT-SW-003 · 사내 일반</a:t>
+              <a:t>© 가상 ICT 기업 · IT-SW-003 · 사내 일반</a:t>
             </a:r>
           </a:p>
         </p:txBody>
@@ -33594,7 +33594,7 @@
                 <a:ea typeface="Malgun Gothic"/>
                 <a:cs typeface="Malgun Gothic"/>
               </a:rPr>
-              <a:t>© HANWHA SYSTEMS ICT · IT-SW-003 · 사내 일반</a:t>
+              <a:t>© 가상 ICT 기업 · IT-SW-003 · 사내 일반</a:t>
             </a:r>
           </a:p>
         </p:txBody>
@@ -35311,7 +35311,7 @@
                 <a:ea typeface="Malgun Gothic"/>
                 <a:cs typeface="Malgun Gothic"/>
               </a:rPr>
-              <a:t>© HANWHA SYSTEMS ICT · IT-SW-003 · 사내 일반</a:t>
+              <a:t>© 가상 ICT 기업 · IT-SW-003 · 사내 일반</a:t>
             </a:r>
           </a:p>
         </p:txBody>
@@ -36605,7 +36605,7 @@
                 <a:ea typeface="Malgun Gothic"/>
                 <a:cs typeface="Malgun Gothic"/>
               </a:rPr>
-              <a:t>© HANWHA SYSTEMS ICT · IT-SW-003 · 사내 일반</a:t>
+              <a:t>© 가상 ICT 기업 · IT-SW-003 · 사내 일반</a:t>
             </a:r>
           </a:p>
         </p:txBody>
@@ -37881,7 +37881,7 @@
                 <a:ea typeface="Malgun Gothic"/>
                 <a:cs typeface="Malgun Gothic"/>
               </a:rPr>
-              <a:t>© HANWHA SYSTEMS ICT · IT-SW-003 · 사내 일반</a:t>
+              <a:t>© 가상 ICT 기업 · IT-SW-003 · 사내 일반</a:t>
             </a:r>
           </a:p>
         </p:txBody>
@@ -40256,7 +40256,7 @@
                 <a:ea typeface="Malgun Gothic"/>
                 <a:cs typeface="Malgun Gothic"/>
               </a:rPr>
-              <a:t>© HANWHA SYSTEMS ICT · IT-SW-003 · 사내 일반</a:t>
+              <a:t>© 가상 ICT 기업 · IT-SW-003 · 사내 일반</a:t>
             </a:r>
           </a:p>
         </p:txBody>
@@ -40504,7 +40504,7 @@
                 <a:ea typeface="Malgun Gothic"/>
                 <a:cs typeface="Malgun Gothic"/>
               </a:rPr>
-              <a:t>© HANWHA SYSTEMS ICT · IT-SW-003 · 사내 일반</a:t>
+              <a:t>© 가상 ICT 기업 · IT-SW-003 · 사내 일반</a:t>
             </a:r>
           </a:p>
         </p:txBody>
@@ -41357,7 +41357,7 @@
                 <a:ea typeface="Malgun Gothic"/>
                 <a:cs typeface="Malgun Gothic"/>
               </a:rPr>
-              <a:t>© HANWHA SYSTEMS ICT · IT-SW-003 · 사내 일반</a:t>
+              <a:t>© 가상 ICT 기업 · IT-SW-003 · 사내 일반</a:t>
             </a:r>
           </a:p>
         </p:txBody>
@@ -41605,7 +41605,7 @@
                 <a:ea typeface="Malgun Gothic"/>
                 <a:cs typeface="Malgun Gothic"/>
               </a:rPr>
-              <a:t>© HANWHA SYSTEMS ICT · IT-SW-003 · 사내 일반</a:t>
+              <a:t>© 가상 ICT 기업 · IT-SW-003 · 사내 일반</a:t>
             </a:r>
           </a:p>
         </p:txBody>
@@ -42262,7 +42262,7 @@
                 <a:ea typeface="Malgun Gothic"/>
                 <a:cs typeface="Malgun Gothic"/>
               </a:rPr>
-              <a:t>© HANWHA SYSTEMS ICT · IT-SW-003 · 사내 일반</a:t>
+              <a:t>© 가상 ICT 기업 · IT-SW-003 · 사내 일반</a:t>
             </a:r>
           </a:p>
         </p:txBody>
@@ -42510,7 +42510,7 @@
                 <a:ea typeface="Malgun Gothic"/>
                 <a:cs typeface="Malgun Gothic"/>
               </a:rPr>
-              <a:t>© HANWHA SYSTEMS ICT · IT-SW-003 · 사내 일반</a:t>
+              <a:t>© 가상 ICT 기업 · IT-SW-003 · 사내 일반</a:t>
             </a:r>
           </a:p>
         </p:txBody>
@@ -43022,7 +43022,7 @@
                           <a:ea typeface="Malgun Gothic"/>
                           <a:cs typeface="Malgun Gothic"/>
                         </a:rPr>
-                        <a:t>사내 IT 포털(hanwha-admin) 상단 [챗봇 문의]</a:t>
+                        <a:t>사내 IT 포털 상단 [챗봇 문의]</a:t>
                       </a:r>
                     </a:p>
                   </a:txBody>
@@ -43714,7 +43714,7 @@
                           <a:ea typeface="Malgun Gothic"/>
                           <a:cs typeface="Malgun Gothic"/>
                         </a:rPr>
-                        <a:t>it-helpdesk@hanwha-ict.example</a:t>
+                        <a:t>it-helpdesk@ict.example</a:t>
                       </a:r>
                     </a:p>
                   </a:txBody>
@@ -44013,7 +44013,7 @@
                 <a:ea typeface="Malgun Gothic"/>
                 <a:cs typeface="Malgun Gothic"/>
               </a:rPr>
-              <a:t>© HANWHA SYSTEMS ICT · IT-SW-003 · 사내 일반</a:t>
+              <a:t>© 가상 ICT 기업 · IT-SW-003 · 사내 일반</a:t>
             </a:r>
           </a:p>
         </p:txBody>
@@ -44261,7 +44261,7 @@
                 <a:ea typeface="Malgun Gothic"/>
                 <a:cs typeface="Malgun Gothic"/>
               </a:rPr>
-              <a:t>© HANWHA SYSTEMS ICT · IT-SW-003 · 사내 일반</a:t>
+              <a:t>© 가상 ICT 기업 · IT-SW-003 · 사내 일반</a:t>
             </a:r>
           </a:p>
         </p:txBody>
@@ -46699,7 +46699,7 @@
                 <a:ea typeface="Malgun Gothic"/>
                 <a:cs typeface="Malgun Gothic"/>
               </a:rPr>
-              <a:t>© HANWHA SYSTEMS ICT · IT-SW-003 · 사내 일반</a:t>
+              <a:t>© 가상 ICT 기업 · IT-SW-003 · 사내 일반</a:t>
             </a:r>
           </a:p>
         </p:txBody>
@@ -47676,7 +47676,7 @@
                 <a:ea typeface="Malgun Gothic"/>
                 <a:cs typeface="Malgun Gothic"/>
               </a:rPr>
-              <a:t>© HANWHA SYSTEMS ICT · IT-SW-003 · 사내 일반</a:t>
+              <a:t>© 가상 ICT 기업 · IT-SW-003 · 사내 일반</a:t>
             </a:r>
           </a:p>
         </p:txBody>
@@ -47924,7 +47924,7 @@
                 <a:ea typeface="Malgun Gothic"/>
                 <a:cs typeface="Malgun Gothic"/>
               </a:rPr>
-              <a:t>© HANWHA SYSTEMS ICT · IT-SW-003 · 사내 일반</a:t>
+              <a:t>© 가상 ICT 기업 · IT-SW-003 · 사내 일반</a:t>
             </a:r>
           </a:p>
         </p:txBody>
@@ -49242,7 +49242,7 @@
                 <a:ea typeface="Malgun Gothic"/>
                 <a:cs typeface="Malgun Gothic"/>
               </a:rPr>
-              <a:t>© HANWHA SYSTEMS ICT · IT-SW-003 · 사내 일반</a:t>
+              <a:t>© 가상 ICT 기업 · IT-SW-003 · 사내 일반</a:t>
             </a:r>
           </a:p>
         </p:txBody>
@@ -49490,7 +49490,7 @@
                 <a:ea typeface="Malgun Gothic"/>
                 <a:cs typeface="Malgun Gothic"/>
               </a:rPr>
-              <a:t>© HANWHA SYSTEMS ICT · IT-SW-003 · 사내 일반</a:t>
+              <a:t>© 가상 ICT 기업 · IT-SW-003 · 사내 일반</a:t>
             </a:r>
           </a:p>
         </p:txBody>
@@ -51731,7 +51731,7 @@
                 <a:ea typeface="Malgun Gothic"/>
                 <a:cs typeface="Malgun Gothic"/>
               </a:rPr>
-              <a:t>© HANWHA SYSTEMS ICT · IT-SW-003 · 사내 일반</a:t>
+              <a:t>© 가상 ICT 기업 · IT-SW-003 · 사내 일반</a:t>
             </a:r>
           </a:p>
         </p:txBody>
@@ -54092,7 +54092,7 @@
                 <a:ea typeface="Malgun Gothic"/>
                 <a:cs typeface="Malgun Gothic"/>
               </a:rPr>
-              <a:t>© HANWHA SYSTEMS ICT · IT-SW-003 · 사내 일반</a:t>
+              <a:t>© 가상 ICT 기업 · IT-SW-003 · 사내 일반</a:t>
             </a:r>
           </a:p>
         </p:txBody>
@@ -55321,7 +55321,7 @@
                 <a:ea typeface="Malgun Gothic"/>
                 <a:cs typeface="Malgun Gothic"/>
               </a:rPr>
-              <a:t>© HANWHA SYSTEMS ICT · IT-SW-003 · 사내 일반</a:t>
+              <a:t>© 가상 ICT 기업 · IT-SW-003 · 사내 일반</a:t>
             </a:r>
           </a:p>
         </p:txBody>
